--- a/Day1_Probability/FW536_Day1_Morning_intro to probability_nosoln.pptx
+++ b/Day1_Probability/FW536_Day1_Morning_intro to probability_nosoln.pptx
@@ -8,10 +8,10 @@
     <p:notesMasterId r:id="rId54"/>
   </p:notesMasterIdLst>
   <p:sldIdLst>
-    <p:sldId id="257" r:id="rId2"/>
+    <p:sldId id="342" r:id="rId2"/>
     <p:sldId id="336" r:id="rId3"/>
     <p:sldId id="259" r:id="rId4"/>
-    <p:sldId id="341" r:id="rId5"/>
+    <p:sldId id="343" r:id="rId5"/>
     <p:sldId id="307" r:id="rId6"/>
     <p:sldId id="262" r:id="rId7"/>
     <p:sldId id="263" r:id="rId8"/>
@@ -248,7 +248,7 @@
           <a:p>
             <a:fld id="{078FFA9F-E4FE-2949-B991-E9E1D16A3A2F}" type="datetimeFigureOut">
               <a:rPr lang="en-US" smtClean="0"/>
-              <a:t>9/18/25</a:t>
+              <a:t>9/11/26</a:t>
             </a:fld>
             <a:endParaRPr lang="en-US"/>
           </a:p>
@@ -655,7 +655,7 @@
               </a14:hiddenEffects>
             </a:ext>
             <a:ext uri="{FAA26D3D-D897-4be2-8F04-BA451C77F1D7}">
-              <ma14:placeholderFlag xmlns="" xmlns:ma14="http://schemas.microsoft.com/office/mac/drawingml/2011/main" val="1"/>
+              <ma14:placeholderFlag xmlns:ma14="http://schemas.microsoft.com/office/mac/drawingml/2011/main" xmlns="" val="1"/>
             </a:ext>
           </a:extLst>
         </p:spPr>
@@ -740,7 +740,7 @@
               </a14:hiddenEffects>
             </a:ext>
             <a:ext uri="{FAA26D3D-D897-4be2-8F04-BA451C77F1D7}">
-              <ma14:placeholderFlag xmlns="" xmlns:ma14="http://schemas.microsoft.com/office/mac/drawingml/2011/main" val="1"/>
+              <ma14:placeholderFlag xmlns:ma14="http://schemas.microsoft.com/office/mac/drawingml/2011/main" xmlns="" val="1"/>
             </a:ext>
           </a:extLst>
         </p:spPr>
@@ -825,7 +825,7 @@
               </a14:hiddenEffects>
             </a:ext>
             <a:ext uri="{FAA26D3D-D897-4be2-8F04-BA451C77F1D7}">
-              <ma14:placeholderFlag xmlns="" xmlns:ma14="http://schemas.microsoft.com/office/mac/drawingml/2011/main" val="1"/>
+              <ma14:placeholderFlag xmlns:ma14="http://schemas.microsoft.com/office/mac/drawingml/2011/main" xmlns="" val="1"/>
             </a:ext>
           </a:extLst>
         </p:spPr>
@@ -910,7 +910,7 @@
               </a14:hiddenEffects>
             </a:ext>
             <a:ext uri="{FAA26D3D-D897-4be2-8F04-BA451C77F1D7}">
-              <ma14:placeholderFlag xmlns="" xmlns:ma14="http://schemas.microsoft.com/office/mac/drawingml/2011/main" val="1"/>
+              <ma14:placeholderFlag xmlns:ma14="http://schemas.microsoft.com/office/mac/drawingml/2011/main" xmlns="" val="1"/>
             </a:ext>
           </a:extLst>
         </p:spPr>
@@ -995,7 +995,7 @@
               </a14:hiddenEffects>
             </a:ext>
             <a:ext uri="{FAA26D3D-D897-4be2-8F04-BA451C77F1D7}">
-              <ma14:placeholderFlag xmlns="" xmlns:ma14="http://schemas.microsoft.com/office/mac/drawingml/2011/main" val="1"/>
+              <ma14:placeholderFlag xmlns:ma14="http://schemas.microsoft.com/office/mac/drawingml/2011/main" xmlns="" val="1"/>
             </a:ext>
           </a:extLst>
         </p:spPr>
@@ -1080,7 +1080,7 @@
               </a14:hiddenEffects>
             </a:ext>
             <a:ext uri="{FAA26D3D-D897-4be2-8F04-BA451C77F1D7}">
-              <ma14:placeholderFlag xmlns="" xmlns:ma14="http://schemas.microsoft.com/office/mac/drawingml/2011/main" val="1"/>
+              <ma14:placeholderFlag xmlns:ma14="http://schemas.microsoft.com/office/mac/drawingml/2011/main" xmlns="" val="1"/>
             </a:ext>
           </a:extLst>
         </p:spPr>
@@ -1165,7 +1165,7 @@
               </a14:hiddenEffects>
             </a:ext>
             <a:ext uri="{FAA26D3D-D897-4be2-8F04-BA451C77F1D7}">
-              <ma14:placeholderFlag xmlns="" xmlns:ma14="http://schemas.microsoft.com/office/mac/drawingml/2011/main" val="1"/>
+              <ma14:placeholderFlag xmlns:ma14="http://schemas.microsoft.com/office/mac/drawingml/2011/main" xmlns="" val="1"/>
             </a:ext>
           </a:extLst>
         </p:spPr>
@@ -1250,7 +1250,7 @@
               </a14:hiddenEffects>
             </a:ext>
             <a:ext uri="{FAA26D3D-D897-4be2-8F04-BA451C77F1D7}">
-              <ma14:placeholderFlag xmlns="" xmlns:ma14="http://schemas.microsoft.com/office/mac/drawingml/2011/main" val="1"/>
+              <ma14:placeholderFlag xmlns:ma14="http://schemas.microsoft.com/office/mac/drawingml/2011/main" xmlns="" val="1"/>
             </a:ext>
           </a:extLst>
         </p:spPr>
@@ -1335,7 +1335,7 @@
               </a14:hiddenEffects>
             </a:ext>
             <a:ext uri="{FAA26D3D-D897-4be2-8F04-BA451C77F1D7}">
-              <ma14:placeholderFlag xmlns="" xmlns:ma14="http://schemas.microsoft.com/office/mac/drawingml/2011/main" val="1"/>
+              <ma14:placeholderFlag xmlns:ma14="http://schemas.microsoft.com/office/mac/drawingml/2011/main" xmlns="" val="1"/>
             </a:ext>
           </a:extLst>
         </p:spPr>
@@ -1420,7 +1420,7 @@
               </a14:hiddenEffects>
             </a:ext>
             <a:ext uri="{FAA26D3D-D897-4be2-8F04-BA451C77F1D7}">
-              <ma14:placeholderFlag xmlns="" xmlns:ma14="http://schemas.microsoft.com/office/mac/drawingml/2011/main" val="1"/>
+              <ma14:placeholderFlag xmlns:ma14="http://schemas.microsoft.com/office/mac/drawingml/2011/main" xmlns="" val="1"/>
             </a:ext>
           </a:extLst>
         </p:spPr>
@@ -1505,7 +1505,7 @@
               </a14:hiddenEffects>
             </a:ext>
             <a:ext uri="{FAA26D3D-D897-4be2-8F04-BA451C77F1D7}">
-              <ma14:placeholderFlag xmlns="" xmlns:ma14="http://schemas.microsoft.com/office/mac/drawingml/2011/main" val="1"/>
+              <ma14:placeholderFlag xmlns:ma14="http://schemas.microsoft.com/office/mac/drawingml/2011/main" xmlns="" val="1"/>
             </a:ext>
           </a:extLst>
         </p:spPr>
@@ -1590,7 +1590,7 @@
               </a14:hiddenEffects>
             </a:ext>
             <a:ext uri="{FAA26D3D-D897-4be2-8F04-BA451C77F1D7}">
-              <ma14:placeholderFlag xmlns="" xmlns:ma14="http://schemas.microsoft.com/office/mac/drawingml/2011/main" val="1"/>
+              <ma14:placeholderFlag xmlns:ma14="http://schemas.microsoft.com/office/mac/drawingml/2011/main" xmlns="" val="1"/>
             </a:ext>
           </a:extLst>
         </p:spPr>
@@ -1675,7 +1675,7 @@
               </a14:hiddenEffects>
             </a:ext>
             <a:ext uri="{FAA26D3D-D897-4be2-8F04-BA451C77F1D7}">
-              <ma14:placeholderFlag xmlns="" xmlns:ma14="http://schemas.microsoft.com/office/mac/drawingml/2011/main" val="1"/>
+              <ma14:placeholderFlag xmlns:ma14="http://schemas.microsoft.com/office/mac/drawingml/2011/main" xmlns="" val="1"/>
             </a:ext>
           </a:extLst>
         </p:spPr>
@@ -1760,7 +1760,7 @@
               </a14:hiddenEffects>
             </a:ext>
             <a:ext uri="{FAA26D3D-D897-4be2-8F04-BA451C77F1D7}">
-              <ma14:placeholderFlag xmlns="" xmlns:ma14="http://schemas.microsoft.com/office/mac/drawingml/2011/main" val="1"/>
+              <ma14:placeholderFlag xmlns:ma14="http://schemas.microsoft.com/office/mac/drawingml/2011/main" xmlns="" val="1"/>
             </a:ext>
           </a:extLst>
         </p:spPr>
@@ -1845,7 +1845,7 @@
               </a14:hiddenEffects>
             </a:ext>
             <a:ext uri="{FAA26D3D-D897-4be2-8F04-BA451C77F1D7}">
-              <ma14:placeholderFlag xmlns="" xmlns:ma14="http://schemas.microsoft.com/office/mac/drawingml/2011/main" val="1"/>
+              <ma14:placeholderFlag xmlns:ma14="http://schemas.microsoft.com/office/mac/drawingml/2011/main" xmlns="" val="1"/>
             </a:ext>
           </a:extLst>
         </p:spPr>
@@ -2332,7 +2332,7 @@
               </a14:hiddenEffects>
             </a:ext>
             <a:ext uri="{FAA26D3D-D897-4be2-8F04-BA451C77F1D7}">
-              <ma14:placeholderFlag xmlns="" xmlns:ma14="http://schemas.microsoft.com/office/mac/drawingml/2011/main" val="1"/>
+              <ma14:placeholderFlag xmlns:ma14="http://schemas.microsoft.com/office/mac/drawingml/2011/main" xmlns="" val="1"/>
             </a:ext>
           </a:extLst>
         </p:spPr>
@@ -2988,7 +2988,7 @@
               </a14:hiddenEffects>
             </a:ext>
             <a:ext uri="{FAA26D3D-D897-4be2-8F04-BA451C77F1D7}">
-              <ma14:placeholderFlag xmlns:ma14="http://schemas.microsoft.com/office/mac/drawingml/2011/main" xmlns="" val="1"/>
+              <ma14:placeholderFlag xmlns="" xmlns:ma14="http://schemas.microsoft.com/office/mac/drawingml/2011/main" val="1"/>
             </a:ext>
           </a:extLst>
         </p:spPr>
@@ -3073,7 +3073,7 @@
               </a14:hiddenEffects>
             </a:ext>
             <a:ext uri="{FAA26D3D-D897-4be2-8F04-BA451C77F1D7}">
-              <ma14:placeholderFlag xmlns="" xmlns:ma14="http://schemas.microsoft.com/office/mac/drawingml/2011/main" val="1"/>
+              <ma14:placeholderFlag xmlns:ma14="http://schemas.microsoft.com/office/mac/drawingml/2011/main" xmlns="" val="1"/>
             </a:ext>
           </a:extLst>
         </p:spPr>
@@ -3158,7 +3158,7 @@
               </a14:hiddenEffects>
             </a:ext>
             <a:ext uri="{FAA26D3D-D897-4be2-8F04-BA451C77F1D7}">
-              <ma14:placeholderFlag xmlns="" xmlns:ma14="http://schemas.microsoft.com/office/mac/drawingml/2011/main" val="1"/>
+              <ma14:placeholderFlag xmlns:ma14="http://schemas.microsoft.com/office/mac/drawingml/2011/main" xmlns="" val="1"/>
             </a:ext>
           </a:extLst>
         </p:spPr>
@@ -3243,7 +3243,7 @@
               </a14:hiddenEffects>
             </a:ext>
             <a:ext uri="{FAA26D3D-D897-4be2-8F04-BA451C77F1D7}">
-              <ma14:placeholderFlag xmlns="" xmlns:ma14="http://schemas.microsoft.com/office/mac/drawingml/2011/main" val="1"/>
+              <ma14:placeholderFlag xmlns:ma14="http://schemas.microsoft.com/office/mac/drawingml/2011/main" xmlns="" val="1"/>
             </a:ext>
           </a:extLst>
         </p:spPr>
@@ -3402,7 +3402,7 @@
           <a:p>
             <a:fld id="{FC959C97-01B5-694B-9820-37B576367CF4}" type="datetimeFigureOut">
               <a:rPr lang="en-US" smtClean="0"/>
-              <a:t>9/18/25</a:t>
+              <a:t>9/11/26</a:t>
             </a:fld>
             <a:endParaRPr lang="en-US"/>
           </a:p>
@@ -3570,7 +3570,7 @@
           <a:p>
             <a:fld id="{FC959C97-01B5-694B-9820-37B576367CF4}" type="datetimeFigureOut">
               <a:rPr lang="en-US" smtClean="0"/>
-              <a:t>9/18/25</a:t>
+              <a:t>9/11/26</a:t>
             </a:fld>
             <a:endParaRPr lang="en-US"/>
           </a:p>
@@ -3748,7 +3748,7 @@
           <a:p>
             <a:fld id="{FC959C97-01B5-694B-9820-37B576367CF4}" type="datetimeFigureOut">
               <a:rPr lang="en-US" smtClean="0"/>
-              <a:t>9/18/25</a:t>
+              <a:t>9/11/26</a:t>
             </a:fld>
             <a:endParaRPr lang="en-US"/>
           </a:p>
@@ -4673,7 +4673,7 @@
           <a:p>
             <a:fld id="{FC959C97-01B5-694B-9820-37B576367CF4}" type="datetimeFigureOut">
               <a:rPr lang="en-US" smtClean="0"/>
-              <a:t>9/18/25</a:t>
+              <a:t>9/11/26</a:t>
             </a:fld>
             <a:endParaRPr lang="en-US"/>
           </a:p>
@@ -4918,7 +4918,7 @@
           <a:p>
             <a:fld id="{FC959C97-01B5-694B-9820-37B576367CF4}" type="datetimeFigureOut">
               <a:rPr lang="en-US" smtClean="0"/>
-              <a:t>9/18/25</a:t>
+              <a:t>9/11/26</a:t>
             </a:fld>
             <a:endParaRPr lang="en-US"/>
           </a:p>
@@ -5147,7 +5147,7 @@
           <a:p>
             <a:fld id="{FC959C97-01B5-694B-9820-37B576367CF4}" type="datetimeFigureOut">
               <a:rPr lang="en-US" smtClean="0"/>
-              <a:t>9/18/25</a:t>
+              <a:t>9/11/26</a:t>
             </a:fld>
             <a:endParaRPr lang="en-US"/>
           </a:p>
@@ -5511,7 +5511,7 @@
           <a:p>
             <a:fld id="{FC959C97-01B5-694B-9820-37B576367CF4}" type="datetimeFigureOut">
               <a:rPr lang="en-US" smtClean="0"/>
-              <a:t>9/18/25</a:t>
+              <a:t>9/11/26</a:t>
             </a:fld>
             <a:endParaRPr lang="en-US"/>
           </a:p>
@@ -5628,7 +5628,7 @@
           <a:p>
             <a:fld id="{FC959C97-01B5-694B-9820-37B576367CF4}" type="datetimeFigureOut">
               <a:rPr lang="en-US" smtClean="0"/>
-              <a:t>9/18/25</a:t>
+              <a:t>9/11/26</a:t>
             </a:fld>
             <a:endParaRPr lang="en-US"/>
           </a:p>
@@ -5723,7 +5723,7 @@
           <a:p>
             <a:fld id="{FC959C97-01B5-694B-9820-37B576367CF4}" type="datetimeFigureOut">
               <a:rPr lang="en-US" smtClean="0"/>
-              <a:t>9/18/25</a:t>
+              <a:t>9/11/26</a:t>
             </a:fld>
             <a:endParaRPr lang="en-US"/>
           </a:p>
@@ -5998,7 +5998,7 @@
           <a:p>
             <a:fld id="{FC959C97-01B5-694B-9820-37B576367CF4}" type="datetimeFigureOut">
               <a:rPr lang="en-US" smtClean="0"/>
-              <a:t>9/18/25</a:t>
+              <a:t>9/11/26</a:t>
             </a:fld>
             <a:endParaRPr lang="en-US"/>
           </a:p>
@@ -6250,7 +6250,7 @@
           <a:p>
             <a:fld id="{FC959C97-01B5-694B-9820-37B576367CF4}" type="datetimeFigureOut">
               <a:rPr lang="en-US" smtClean="0"/>
-              <a:t>9/18/25</a:t>
+              <a:t>9/11/26</a:t>
             </a:fld>
             <a:endParaRPr lang="en-US"/>
           </a:p>
@@ -6461,7 +6461,7 @@
           <a:p>
             <a:fld id="{FC959C97-01B5-694B-9820-37B576367CF4}" type="datetimeFigureOut">
               <a:rPr lang="en-US" smtClean="0"/>
-              <a:t>9/18/25</a:t>
+              <a:t>9/11/26</a:t>
             </a:fld>
             <a:endParaRPr lang="en-US"/>
           </a:p>
@@ -6886,7 +6886,9 @@
           </a:xfrm>
         </p:spPr>
         <p:txBody>
-          <a:bodyPr/>
+          <a:bodyPr>
+            <a:normAutofit fontScale="90000"/>
+          </a:bodyPr>
           <a:lstStyle/>
           <a:p>
             <a:pPr algn="ctr" eaLnBrk="1" hangingPunct="1">
@@ -6898,15 +6900,7 @@
                 <a:ea typeface="Arial" charset="0"/>
                 <a:cs typeface="Arial" charset="0"/>
               </a:rPr>
-              <a:t>FW599 - </a:t>
-            </a:r>
-            <a:r>
-              <a:rPr lang="en-US" altLang="en-US" sz="4000" b="1">
-                <a:latin typeface="Arial" charset="0"/>
-                <a:ea typeface="Arial" charset="0"/>
-                <a:cs typeface="Arial" charset="0"/>
-              </a:rPr>
-              <a:t>Fall 2024</a:t>
+              <a:t>FW536 – Statistical modeling for ecology and conservation </a:t>
             </a:r>
             <a:br>
               <a:rPr lang="en-US" altLang="en-US" sz="4000" b="1" dirty="0">
@@ -6928,7 +6922,7 @@
                 <a:ea typeface="Arial" charset="0"/>
                 <a:cs typeface="Arial" charset="0"/>
               </a:rPr>
-              <a:t>Get your data on!</a:t>
+              <a:t>AKA Get your data on!</a:t>
             </a:r>
             <a:endParaRPr lang="en-AU" altLang="en-US" sz="3200" b="1" dirty="0"/>
           </a:p>
@@ -6937,7 +6931,7 @@
     </p:spTree>
     <p:extLst>
       <p:ext uri="{BB962C8B-B14F-4D97-AF65-F5344CB8AC3E}">
-        <p14:creationId xmlns:p14="http://schemas.microsoft.com/office/powerpoint/2010/main" val="926511034"/>
+        <p14:creationId xmlns:p14="http://schemas.microsoft.com/office/powerpoint/2010/main" val="617864679"/>
       </p:ext>
     </p:extLst>
   </p:cSld>
@@ -28849,25 +28843,9 @@
                   <a:schemeClr val="tx1"/>
                 </a:solidFill>
                 <a:latin typeface="Arial" charset="0"/>
-                <a:ea typeface="Arial" charset="0"/>
                 <a:cs typeface="Arial" charset="0"/>
               </a:rPr>
-              <a:t>Pre-course exam (50 points, scored generously)</a:t>
-            </a:r>
-          </a:p>
-          <a:p>
-            <a:pPr algn="ctr" eaLnBrk="1" hangingPunct="1">
-              <a:defRPr/>
-            </a:pPr>
-            <a:r>
-              <a:rPr lang="en-US" altLang="en-US" sz="3200" kern="0" dirty="0">
-                <a:solidFill>
-                  <a:schemeClr val="tx1"/>
-                </a:solidFill>
-                <a:latin typeface="Arial" charset="0"/>
-                <a:cs typeface="Arial" charset="0"/>
-              </a:rPr>
-              <a:t>Nine problem sets, one per session (20 points each, 180 points)</a:t>
+              <a:t>Labs (180 points)</a:t>
             </a:r>
             <a:endParaRPr lang="en-AU" altLang="en-US" sz="3200" kern="0" dirty="0">
               <a:solidFill>
@@ -28880,7 +28858,7 @@
     </p:spTree>
     <p:extLst>
       <p:ext uri="{BB962C8B-B14F-4D97-AF65-F5344CB8AC3E}">
-        <p14:creationId xmlns:p14="http://schemas.microsoft.com/office/powerpoint/2010/main" val="2712359552"/>
+        <p14:creationId xmlns:p14="http://schemas.microsoft.com/office/powerpoint/2010/main" val="4144808605"/>
       </p:ext>
     </p:extLst>
   </p:cSld>

--- a/Day1_Probability/FW536_Day1_Morning_intro to probability_nosoln.pptx
+++ b/Day1_Probability/FW536_Day1_Morning_intro to probability_nosoln.pptx
@@ -248,7 +248,7 @@
           <a:p>
             <a:fld id="{078FFA9F-E4FE-2949-B991-E9E1D16A3A2F}" type="datetimeFigureOut">
               <a:rPr lang="en-US" smtClean="0"/>
-              <a:t>9/11/26</a:t>
+              <a:t>9/13/26</a:t>
             </a:fld>
             <a:endParaRPr lang="en-US"/>
           </a:p>
@@ -570,7 +570,7 @@
               </a14:hiddenEffects>
             </a:ext>
             <a:ext uri="{FAA26D3D-D897-4be2-8F04-BA451C77F1D7}">
-              <ma14:placeholderFlag xmlns="" xmlns:ma14="http://schemas.microsoft.com/office/mac/drawingml/2011/main" val="1"/>
+              <ma14:placeholderFlag xmlns:ma14="http://schemas.microsoft.com/office/mac/drawingml/2011/main" xmlns="" val="1"/>
             </a:ext>
           </a:extLst>
         </p:spPr>
@@ -655,7 +655,7 @@
               </a14:hiddenEffects>
             </a:ext>
             <a:ext uri="{FAA26D3D-D897-4be2-8F04-BA451C77F1D7}">
-              <ma14:placeholderFlag xmlns:ma14="http://schemas.microsoft.com/office/mac/drawingml/2011/main" xmlns="" val="1"/>
+              <ma14:placeholderFlag xmlns="" xmlns:ma14="http://schemas.microsoft.com/office/mac/drawingml/2011/main" val="1"/>
             </a:ext>
           </a:extLst>
         </p:spPr>
@@ -740,7 +740,7 @@
               </a14:hiddenEffects>
             </a:ext>
             <a:ext uri="{FAA26D3D-D897-4be2-8F04-BA451C77F1D7}">
-              <ma14:placeholderFlag xmlns:ma14="http://schemas.microsoft.com/office/mac/drawingml/2011/main" xmlns="" val="1"/>
+              <ma14:placeholderFlag xmlns="" xmlns:ma14="http://schemas.microsoft.com/office/mac/drawingml/2011/main" val="1"/>
             </a:ext>
           </a:extLst>
         </p:spPr>
@@ -825,7 +825,7 @@
               </a14:hiddenEffects>
             </a:ext>
             <a:ext uri="{FAA26D3D-D897-4be2-8F04-BA451C77F1D7}">
-              <ma14:placeholderFlag xmlns:ma14="http://schemas.microsoft.com/office/mac/drawingml/2011/main" xmlns="" val="1"/>
+              <ma14:placeholderFlag xmlns="" xmlns:ma14="http://schemas.microsoft.com/office/mac/drawingml/2011/main" val="1"/>
             </a:ext>
           </a:extLst>
         </p:spPr>
@@ -910,7 +910,7 @@
               </a14:hiddenEffects>
             </a:ext>
             <a:ext uri="{FAA26D3D-D897-4be2-8F04-BA451C77F1D7}">
-              <ma14:placeholderFlag xmlns:ma14="http://schemas.microsoft.com/office/mac/drawingml/2011/main" xmlns="" val="1"/>
+              <ma14:placeholderFlag xmlns="" xmlns:ma14="http://schemas.microsoft.com/office/mac/drawingml/2011/main" val="1"/>
             </a:ext>
           </a:extLst>
         </p:spPr>
@@ -995,7 +995,7 @@
               </a14:hiddenEffects>
             </a:ext>
             <a:ext uri="{FAA26D3D-D897-4be2-8F04-BA451C77F1D7}">
-              <ma14:placeholderFlag xmlns:ma14="http://schemas.microsoft.com/office/mac/drawingml/2011/main" xmlns="" val="1"/>
+              <ma14:placeholderFlag xmlns="" xmlns:ma14="http://schemas.microsoft.com/office/mac/drawingml/2011/main" val="1"/>
             </a:ext>
           </a:extLst>
         </p:spPr>
@@ -1080,7 +1080,7 @@
               </a14:hiddenEffects>
             </a:ext>
             <a:ext uri="{FAA26D3D-D897-4be2-8F04-BA451C77F1D7}">
-              <ma14:placeholderFlag xmlns:ma14="http://schemas.microsoft.com/office/mac/drawingml/2011/main" xmlns="" val="1"/>
+              <ma14:placeholderFlag xmlns="" xmlns:ma14="http://schemas.microsoft.com/office/mac/drawingml/2011/main" val="1"/>
             </a:ext>
           </a:extLst>
         </p:spPr>
@@ -1165,7 +1165,7 @@
               </a14:hiddenEffects>
             </a:ext>
             <a:ext uri="{FAA26D3D-D897-4be2-8F04-BA451C77F1D7}">
-              <ma14:placeholderFlag xmlns:ma14="http://schemas.microsoft.com/office/mac/drawingml/2011/main" xmlns="" val="1"/>
+              <ma14:placeholderFlag xmlns="" xmlns:ma14="http://schemas.microsoft.com/office/mac/drawingml/2011/main" val="1"/>
             </a:ext>
           </a:extLst>
         </p:spPr>
@@ -1250,7 +1250,7 @@
               </a14:hiddenEffects>
             </a:ext>
             <a:ext uri="{FAA26D3D-D897-4be2-8F04-BA451C77F1D7}">
-              <ma14:placeholderFlag xmlns:ma14="http://schemas.microsoft.com/office/mac/drawingml/2011/main" xmlns="" val="1"/>
+              <ma14:placeholderFlag xmlns="" xmlns:ma14="http://schemas.microsoft.com/office/mac/drawingml/2011/main" val="1"/>
             </a:ext>
           </a:extLst>
         </p:spPr>
@@ -1335,7 +1335,7 @@
               </a14:hiddenEffects>
             </a:ext>
             <a:ext uri="{FAA26D3D-D897-4be2-8F04-BA451C77F1D7}">
-              <ma14:placeholderFlag xmlns:ma14="http://schemas.microsoft.com/office/mac/drawingml/2011/main" xmlns="" val="1"/>
+              <ma14:placeholderFlag xmlns="" xmlns:ma14="http://schemas.microsoft.com/office/mac/drawingml/2011/main" val="1"/>
             </a:ext>
           </a:extLst>
         </p:spPr>
@@ -1420,7 +1420,7 @@
               </a14:hiddenEffects>
             </a:ext>
             <a:ext uri="{FAA26D3D-D897-4be2-8F04-BA451C77F1D7}">
-              <ma14:placeholderFlag xmlns:ma14="http://schemas.microsoft.com/office/mac/drawingml/2011/main" xmlns="" val="1"/>
+              <ma14:placeholderFlag xmlns="" xmlns:ma14="http://schemas.microsoft.com/office/mac/drawingml/2011/main" val="1"/>
             </a:ext>
           </a:extLst>
         </p:spPr>
@@ -1505,7 +1505,7 @@
               </a14:hiddenEffects>
             </a:ext>
             <a:ext uri="{FAA26D3D-D897-4be2-8F04-BA451C77F1D7}">
-              <ma14:placeholderFlag xmlns:ma14="http://schemas.microsoft.com/office/mac/drawingml/2011/main" xmlns="" val="1"/>
+              <ma14:placeholderFlag xmlns="" xmlns:ma14="http://schemas.microsoft.com/office/mac/drawingml/2011/main" val="1"/>
             </a:ext>
           </a:extLst>
         </p:spPr>
@@ -1590,7 +1590,7 @@
               </a14:hiddenEffects>
             </a:ext>
             <a:ext uri="{FAA26D3D-D897-4be2-8F04-BA451C77F1D7}">
-              <ma14:placeholderFlag xmlns:ma14="http://schemas.microsoft.com/office/mac/drawingml/2011/main" xmlns="" val="1"/>
+              <ma14:placeholderFlag xmlns="" xmlns:ma14="http://schemas.microsoft.com/office/mac/drawingml/2011/main" val="1"/>
             </a:ext>
           </a:extLst>
         </p:spPr>
@@ -1675,7 +1675,7 @@
               </a14:hiddenEffects>
             </a:ext>
             <a:ext uri="{FAA26D3D-D897-4be2-8F04-BA451C77F1D7}">
-              <ma14:placeholderFlag xmlns:ma14="http://schemas.microsoft.com/office/mac/drawingml/2011/main" xmlns="" val="1"/>
+              <ma14:placeholderFlag xmlns="" xmlns:ma14="http://schemas.microsoft.com/office/mac/drawingml/2011/main" val="1"/>
             </a:ext>
           </a:extLst>
         </p:spPr>
@@ -1760,7 +1760,7 @@
               </a14:hiddenEffects>
             </a:ext>
             <a:ext uri="{FAA26D3D-D897-4be2-8F04-BA451C77F1D7}">
-              <ma14:placeholderFlag xmlns:ma14="http://schemas.microsoft.com/office/mac/drawingml/2011/main" xmlns="" val="1"/>
+              <ma14:placeholderFlag xmlns="" xmlns:ma14="http://schemas.microsoft.com/office/mac/drawingml/2011/main" val="1"/>
             </a:ext>
           </a:extLst>
         </p:spPr>
@@ -1845,7 +1845,7 @@
               </a14:hiddenEffects>
             </a:ext>
             <a:ext uri="{FAA26D3D-D897-4be2-8F04-BA451C77F1D7}">
-              <ma14:placeholderFlag xmlns:ma14="http://schemas.microsoft.com/office/mac/drawingml/2011/main" xmlns="" val="1"/>
+              <ma14:placeholderFlag xmlns="" xmlns:ma14="http://schemas.microsoft.com/office/mac/drawingml/2011/main" val="1"/>
             </a:ext>
           </a:extLst>
         </p:spPr>
@@ -2332,7 +2332,7 @@
               </a14:hiddenEffects>
             </a:ext>
             <a:ext uri="{FAA26D3D-D897-4be2-8F04-BA451C77F1D7}">
-              <ma14:placeholderFlag xmlns:ma14="http://schemas.microsoft.com/office/mac/drawingml/2011/main" xmlns="" val="1"/>
+              <ma14:placeholderFlag xmlns="" xmlns:ma14="http://schemas.microsoft.com/office/mac/drawingml/2011/main" val="1"/>
             </a:ext>
           </a:extLst>
         </p:spPr>
@@ -2819,7 +2819,7 @@
               </a14:hiddenEffects>
             </a:ext>
             <a:ext uri="{FAA26D3D-D897-4be2-8F04-BA451C77F1D7}">
-              <ma14:placeholderFlag xmlns:ma14="http://schemas.microsoft.com/office/mac/drawingml/2011/main" xmlns="" val="1"/>
+              <ma14:placeholderFlag xmlns="" xmlns:ma14="http://schemas.microsoft.com/office/mac/drawingml/2011/main" val="1"/>
             </a:ext>
           </a:extLst>
         </p:spPr>
@@ -2988,7 +2988,7 @@
               </a14:hiddenEffects>
             </a:ext>
             <a:ext uri="{FAA26D3D-D897-4be2-8F04-BA451C77F1D7}">
-              <ma14:placeholderFlag xmlns="" xmlns:ma14="http://schemas.microsoft.com/office/mac/drawingml/2011/main" val="1"/>
+              <ma14:placeholderFlag xmlns:ma14="http://schemas.microsoft.com/office/mac/drawingml/2011/main" xmlns="" val="1"/>
             </a:ext>
           </a:extLst>
         </p:spPr>
@@ -3073,7 +3073,7 @@
               </a14:hiddenEffects>
             </a:ext>
             <a:ext uri="{FAA26D3D-D897-4be2-8F04-BA451C77F1D7}">
-              <ma14:placeholderFlag xmlns:ma14="http://schemas.microsoft.com/office/mac/drawingml/2011/main" xmlns="" val="1"/>
+              <ma14:placeholderFlag xmlns="" xmlns:ma14="http://schemas.microsoft.com/office/mac/drawingml/2011/main" val="1"/>
             </a:ext>
           </a:extLst>
         </p:spPr>
@@ -3158,7 +3158,7 @@
               </a14:hiddenEffects>
             </a:ext>
             <a:ext uri="{FAA26D3D-D897-4be2-8F04-BA451C77F1D7}">
-              <ma14:placeholderFlag xmlns:ma14="http://schemas.microsoft.com/office/mac/drawingml/2011/main" xmlns="" val="1"/>
+              <ma14:placeholderFlag xmlns="" xmlns:ma14="http://schemas.microsoft.com/office/mac/drawingml/2011/main" val="1"/>
             </a:ext>
           </a:extLst>
         </p:spPr>
@@ -3243,7 +3243,7 @@
               </a14:hiddenEffects>
             </a:ext>
             <a:ext uri="{FAA26D3D-D897-4be2-8F04-BA451C77F1D7}">
-              <ma14:placeholderFlag xmlns:ma14="http://schemas.microsoft.com/office/mac/drawingml/2011/main" xmlns="" val="1"/>
+              <ma14:placeholderFlag xmlns="" xmlns:ma14="http://schemas.microsoft.com/office/mac/drawingml/2011/main" val="1"/>
             </a:ext>
           </a:extLst>
         </p:spPr>
@@ -3402,7 +3402,7 @@
           <a:p>
             <a:fld id="{FC959C97-01B5-694B-9820-37B576367CF4}" type="datetimeFigureOut">
               <a:rPr lang="en-US" smtClean="0"/>
-              <a:t>9/11/26</a:t>
+              <a:t>9/13/26</a:t>
             </a:fld>
             <a:endParaRPr lang="en-US"/>
           </a:p>
@@ -3570,7 +3570,7 @@
           <a:p>
             <a:fld id="{FC959C97-01B5-694B-9820-37B576367CF4}" type="datetimeFigureOut">
               <a:rPr lang="en-US" smtClean="0"/>
-              <a:t>9/11/26</a:t>
+              <a:t>9/13/26</a:t>
             </a:fld>
             <a:endParaRPr lang="en-US"/>
           </a:p>
@@ -3748,7 +3748,7 @@
           <a:p>
             <a:fld id="{FC959C97-01B5-694B-9820-37B576367CF4}" type="datetimeFigureOut">
               <a:rPr lang="en-US" smtClean="0"/>
-              <a:t>9/11/26</a:t>
+              <a:t>9/13/26</a:t>
             </a:fld>
             <a:endParaRPr lang="en-US"/>
           </a:p>
@@ -4673,7 +4673,7 @@
           <a:p>
             <a:fld id="{FC959C97-01B5-694B-9820-37B576367CF4}" type="datetimeFigureOut">
               <a:rPr lang="en-US" smtClean="0"/>
-              <a:t>9/11/26</a:t>
+              <a:t>9/13/26</a:t>
             </a:fld>
             <a:endParaRPr lang="en-US"/>
           </a:p>
@@ -4918,7 +4918,7 @@
           <a:p>
             <a:fld id="{FC959C97-01B5-694B-9820-37B576367CF4}" type="datetimeFigureOut">
               <a:rPr lang="en-US" smtClean="0"/>
-              <a:t>9/11/26</a:t>
+              <a:t>9/13/26</a:t>
             </a:fld>
             <a:endParaRPr lang="en-US"/>
           </a:p>
@@ -5147,7 +5147,7 @@
           <a:p>
             <a:fld id="{FC959C97-01B5-694B-9820-37B576367CF4}" type="datetimeFigureOut">
               <a:rPr lang="en-US" smtClean="0"/>
-              <a:t>9/11/26</a:t>
+              <a:t>9/13/26</a:t>
             </a:fld>
             <a:endParaRPr lang="en-US"/>
           </a:p>
@@ -5511,7 +5511,7 @@
           <a:p>
             <a:fld id="{FC959C97-01B5-694B-9820-37B576367CF4}" type="datetimeFigureOut">
               <a:rPr lang="en-US" smtClean="0"/>
-              <a:t>9/11/26</a:t>
+              <a:t>9/13/26</a:t>
             </a:fld>
             <a:endParaRPr lang="en-US"/>
           </a:p>
@@ -5628,7 +5628,7 @@
           <a:p>
             <a:fld id="{FC959C97-01B5-694B-9820-37B576367CF4}" type="datetimeFigureOut">
               <a:rPr lang="en-US" smtClean="0"/>
-              <a:t>9/11/26</a:t>
+              <a:t>9/13/26</a:t>
             </a:fld>
             <a:endParaRPr lang="en-US"/>
           </a:p>
@@ -5723,7 +5723,7 @@
           <a:p>
             <a:fld id="{FC959C97-01B5-694B-9820-37B576367CF4}" type="datetimeFigureOut">
               <a:rPr lang="en-US" smtClean="0"/>
-              <a:t>9/11/26</a:t>
+              <a:t>9/13/26</a:t>
             </a:fld>
             <a:endParaRPr lang="en-US"/>
           </a:p>
@@ -5998,7 +5998,7 @@
           <a:p>
             <a:fld id="{FC959C97-01B5-694B-9820-37B576367CF4}" type="datetimeFigureOut">
               <a:rPr lang="en-US" smtClean="0"/>
-              <a:t>9/11/26</a:t>
+              <a:t>9/13/26</a:t>
             </a:fld>
             <a:endParaRPr lang="en-US"/>
           </a:p>
@@ -6250,7 +6250,7 @@
           <a:p>
             <a:fld id="{FC959C97-01B5-694B-9820-37B576367CF4}" type="datetimeFigureOut">
               <a:rPr lang="en-US" smtClean="0"/>
-              <a:t>9/11/26</a:t>
+              <a:t>9/13/26</a:t>
             </a:fld>
             <a:endParaRPr lang="en-US"/>
           </a:p>
@@ -6461,7 +6461,7 @@
           <a:p>
             <a:fld id="{FC959C97-01B5-694B-9820-37B576367CF4}" type="datetimeFigureOut">
               <a:rPr lang="en-US" smtClean="0"/>
-              <a:t>9/11/26</a:t>
+              <a:t>9/13/26</a:t>
             </a:fld>
             <a:endParaRPr lang="en-US"/>
           </a:p>
@@ -28697,7 +28697,7 @@
               </a14:hiddenEffects>
             </a:ext>
             <a:ext uri="{FAA26D3D-D897-4be2-8F04-BA451C77F1D7}">
-              <ma14:placeholderFlag xmlns:ma14="http://schemas.microsoft.com/office/mac/drawingml/2011/main" xmlns="" val="1"/>
+              <ma14:placeholderFlag xmlns="" xmlns:ma14="http://schemas.microsoft.com/office/mac/drawingml/2011/main" val="1"/>
             </a:ext>
           </a:extLst>
         </p:spPr>
